--- a/Courses/UCMATH600-Mathematics-for-Computer-Science/Slides/M01-What-a-Proof-Is-For.pptx
+++ b/Courses/UCMATH600-Mathematics-for-Computer-Science/Slides/M01-What-a-Proof-Is-For.pptx
@@ -4713,7 +4713,7 @@
                 </a:solidFill>
                 <a:latin typeface="Georgia"/>
               </a:rPr>
-              <a:t>and four to six weeks here is the stated cost of passing it.</a:t>
+              <a:t>and a term here — thirteen modules and two project weeks — is the stated cost of passing it.</a:t>
             </a:r>
           </a:p>
           <a:p>
@@ -4750,7 +4750,7 @@
                 </a:solidFill>
                 <a:latin typeface="Georgia"/>
               </a:rPr>
-              <a:t>it is the highest-return four weeks in the whole program</a:t>
+              <a:t>it is the highest-return term in the whole program</a:t>
             </a:r>
             <a:r>
               <a:rPr sz="1600" b="0" i="0">
